--- a/ppt_researchpaper.pptx
+++ b/ppt_researchpaper.pptx
@@ -5,10 +5,10 @@
     <p:sldMasterId id="2147483648" r:id="rId4"/>
   </p:sldMasterIdLst>
   <p:notesMasterIdLst>
-    <p:notesMasterId r:id="rId13"/>
+    <p:notesMasterId r:id="rId14"/>
   </p:notesMasterIdLst>
   <p:handoutMasterIdLst>
-    <p:handoutMasterId r:id="rId14"/>
+    <p:handoutMasterId r:id="rId15"/>
   </p:handoutMasterIdLst>
   <p:sldIdLst>
     <p:sldId id="256" r:id="rId5"/>
@@ -16,9 +16,10 @@
     <p:sldId id="269" r:id="rId7"/>
     <p:sldId id="270" r:id="rId8"/>
     <p:sldId id="271" r:id="rId9"/>
-    <p:sldId id="273" r:id="rId10"/>
-    <p:sldId id="274" r:id="rId11"/>
-    <p:sldId id="272" r:id="rId12"/>
+    <p:sldId id="275" r:id="rId10"/>
+    <p:sldId id="273" r:id="rId11"/>
+    <p:sldId id="274" r:id="rId12"/>
+    <p:sldId id="272" r:id="rId13"/>
   </p:sldIdLst>
   <p:sldSz cx="9144000" cy="6858000" type="screen4x3"/>
   <p:notesSz cx="7559675" cy="10691813"/>
@@ -231,7 +232,7 @@
             <a:fld id="{25D2B5EB-424D-4C39-A8AB-65F1D7895EF3}" type="datetimeFigureOut">
               <a:rPr lang="en-US" smtClean="0"/>
               <a:pPr/>
-              <a:t>5/6/2026</a:t>
+              <a:t>5/13/2026</a:t>
             </a:fld>
             <a:endParaRPr lang="en-US"/>
           </a:p>
@@ -414,7 +415,7 @@
             <a:fld id="{888BC1CF-45D5-4DEE-AAB8-8C5341844FC9}" type="datetimeFigureOut">
               <a:rPr lang="en-US" smtClean="0"/>
               <a:pPr/>
-              <a:t>5/6/2026</a:t>
+              <a:t>5/13/2026</a:t>
             </a:fld>
             <a:endParaRPr lang="en-US"/>
           </a:p>
@@ -5035,6 +5036,36 @@
           </a:p>
         </p:txBody>
       </p:sp>
+      <p:pic>
+        <p:nvPicPr>
+          <p:cNvPr id="2" name="Picture 1">
+            <a:extLst>
+              <a:ext uri="{FF2B5EF4-FFF2-40B4-BE49-F238E27FC236}">
+                <a16:creationId xmlns:a16="http://schemas.microsoft.com/office/drawing/2014/main" id="{31A90912-1B6E-56E5-8B15-96210A9BAE72}"/>
+              </a:ext>
+            </a:extLst>
+          </p:cNvPr>
+          <p:cNvPicPr>
+            <a:picLocks noChangeAspect="1"/>
+          </p:cNvPicPr>
+          <p:nvPr/>
+        </p:nvPicPr>
+        <p:blipFill>
+          <a:blip r:embed="rId2"/>
+          <a:stretch>
+            <a:fillRect/>
+          </a:stretch>
+        </p:blipFill>
+        <p:spPr>
+          <a:xfrm>
+            <a:off x="2353492" y="3270428"/>
+            <a:ext cx="3590108" cy="3191207"/>
+          </a:xfrm>
+          <a:prstGeom prst="rect">
+            <a:avLst/>
+          </a:prstGeom>
+        </p:spPr>
+      </p:pic>
     </p:spTree>
     <p:extLst>
       <p:ext uri="{BB962C8B-B14F-4D97-AF65-F5344CB8AC3E}">
@@ -5529,7 +5560,7 @@
         <p:cNvPr id="1" name="">
           <a:extLst>
             <a:ext uri="{FF2B5EF4-FFF2-40B4-BE49-F238E27FC236}">
-              <a16:creationId xmlns:a16="http://schemas.microsoft.com/office/drawing/2014/main" id="{DC897CF7-8B76-B893-20BA-8B5957A92177}"/>
+              <a16:creationId xmlns:a16="http://schemas.microsoft.com/office/drawing/2014/main" id="{BFDBD8E6-34B5-334F-A360-C4303E2BF2F9}"/>
             </a:ext>
           </a:extLst>
         </p:cNvPr>
@@ -5549,7 +5580,7 @@
           <p:cNvPr id="108" name="TextShape 1">
             <a:extLst>
               <a:ext uri="{FF2B5EF4-FFF2-40B4-BE49-F238E27FC236}">
-                <a16:creationId xmlns:a16="http://schemas.microsoft.com/office/drawing/2014/main" id="{5A04A6F1-BECD-7DBB-01EA-76499F196189}"/>
+                <a16:creationId xmlns:a16="http://schemas.microsoft.com/office/drawing/2014/main" id="{61CDF8DD-CA88-C0CD-9836-47DF523EA496}"/>
               </a:ext>
             </a:extLst>
           </p:cNvPr>
@@ -5581,11 +5612,14 @@
               </a:lnSpc>
             </a:pPr>
             <a:r>
-              <a:rPr lang="en" sz="3200" dirty="0">
+              <a:rPr lang="en" sz="3200" b="0" strike="noStrike" spc="-1" dirty="0">
+                <a:solidFill>
+                  <a:srgbClr val="000000"/>
+                </a:solidFill>
                 <a:latin typeface="Times New Roman" panose="02020603050405020304" pitchFamily="18" charset="0"/>
                 <a:cs typeface="Times New Roman" panose="02020603050405020304" pitchFamily="18" charset="0"/>
               </a:rPr>
-              <a:t>Fututre Scope</a:t>
+              <a:t>Workflow</a:t>
             </a:r>
             <a:endParaRPr lang="en-US" sz="3000" b="0" strike="noStrike" spc="-1" dirty="0">
               <a:solidFill>
@@ -5602,7 +5636,7 @@
           <p:cNvPr id="110" name="TextShape 3">
             <a:extLst>
               <a:ext uri="{FF2B5EF4-FFF2-40B4-BE49-F238E27FC236}">
-                <a16:creationId xmlns:a16="http://schemas.microsoft.com/office/drawing/2014/main" id="{330577CF-5172-96AF-49E0-DC7929789FB9}"/>
+                <a16:creationId xmlns:a16="http://schemas.microsoft.com/office/drawing/2014/main" id="{7450976A-99FD-B785-8EE3-3DD5D531240A}"/>
               </a:ext>
             </a:extLst>
           </p:cNvPr>
@@ -5659,6 +5693,410 @@
           <p:cNvPr id="5" name="TextShape 2">
             <a:extLst>
               <a:ext uri="{FF2B5EF4-FFF2-40B4-BE49-F238E27FC236}">
+                <a16:creationId xmlns:a16="http://schemas.microsoft.com/office/drawing/2014/main" id="{CAD06363-5345-F873-229E-A5DADE1B5205}"/>
+              </a:ext>
+            </a:extLst>
+          </p:cNvPr>
+          <p:cNvSpPr txBox="1"/>
+          <p:nvPr/>
+        </p:nvSpPr>
+        <p:spPr>
+          <a:xfrm>
+            <a:off x="164008" y="1109742"/>
+            <a:ext cx="8838720" cy="4838571"/>
+          </a:xfrm>
+          <a:prstGeom prst="rect">
+            <a:avLst/>
+          </a:prstGeom>
+          <a:noFill/>
+          <a:ln w="9360">
+            <a:noFill/>
+          </a:ln>
+        </p:spPr>
+        <p:txBody>
+          <a:bodyPr>
+            <a:noAutofit/>
+          </a:bodyPr>
+          <a:lstStyle/>
+          <a:p>
+            <a:pPr marL="342900" indent="-342900">
+              <a:buFont typeface="Arial" panose="020B0604020202020204" pitchFamily="34" charset="0"/>
+              <a:buChar char="•"/>
+              <a:defRPr sz="2000"/>
+            </a:pPr>
+            <a:r>
+              <a:rPr lang="en-US" dirty="0">
+                <a:latin typeface="Times New Roman" panose="02020603050405020304" pitchFamily="18" charset="0"/>
+                <a:cs typeface="Times New Roman" panose="02020603050405020304" pitchFamily="18" charset="0"/>
+              </a:rPr>
+              <a:t>User logs into the system using MetaMask wallet.</a:t>
+            </a:r>
+          </a:p>
+          <a:p>
+            <a:pPr marL="342900" indent="-342900">
+              <a:buFont typeface="Arial" panose="020B0604020202020204" pitchFamily="34" charset="0"/>
+              <a:buChar char="•"/>
+              <a:defRPr sz="2000"/>
+            </a:pPr>
+            <a:r>
+              <a:rPr lang="en-US" dirty="0">
+                <a:latin typeface="Times New Roman" panose="02020603050405020304" pitchFamily="18" charset="0"/>
+                <a:cs typeface="Times New Roman" panose="02020603050405020304" pitchFamily="18" charset="0"/>
+              </a:rPr>
+              <a:t>Producer uploads energy listing with required details.</a:t>
+            </a:r>
+          </a:p>
+          <a:p>
+            <a:pPr marL="342900" indent="-342900">
+              <a:buFont typeface="Arial" panose="020B0604020202020204" pitchFamily="34" charset="0"/>
+              <a:buChar char="•"/>
+              <a:defRPr sz="2000"/>
+            </a:pPr>
+            <a:r>
+              <a:rPr lang="en-US" dirty="0">
+                <a:latin typeface="Times New Roman" panose="02020603050405020304" pitchFamily="18" charset="0"/>
+                <a:cs typeface="Times New Roman" panose="02020603050405020304" pitchFamily="18" charset="0"/>
+              </a:rPr>
+              <a:t>Consumer selects desired energy listing.</a:t>
+            </a:r>
+          </a:p>
+          <a:p>
+            <a:pPr marL="342900" indent="-342900">
+              <a:buFont typeface="Arial" panose="020B0604020202020204" pitchFamily="34" charset="0"/>
+              <a:buChar char="•"/>
+              <a:defRPr sz="2000"/>
+            </a:pPr>
+            <a:r>
+              <a:rPr lang="en-US" dirty="0">
+                <a:latin typeface="Times New Roman" panose="02020603050405020304" pitchFamily="18" charset="0"/>
+                <a:cs typeface="Times New Roman" panose="02020603050405020304" pitchFamily="18" charset="0"/>
+              </a:rPr>
+              <a:t>Smart contract checks conditions like balance and availability.</a:t>
+            </a:r>
+          </a:p>
+          <a:p>
+            <a:pPr marL="342900" indent="-342900">
+              <a:buFont typeface="Arial" panose="020B0604020202020204" pitchFamily="34" charset="0"/>
+              <a:buChar char="•"/>
+              <a:defRPr sz="2000"/>
+            </a:pPr>
+            <a:r>
+              <a:rPr lang="en-US" dirty="0">
+                <a:latin typeface="Times New Roman" panose="02020603050405020304" pitchFamily="18" charset="0"/>
+                <a:cs typeface="Times New Roman" panose="02020603050405020304" pitchFamily="18" charset="0"/>
+              </a:rPr>
+              <a:t>Transaction is executed and ownership is transferred.</a:t>
+            </a:r>
+          </a:p>
+          <a:p>
+            <a:pPr marL="342900" indent="-342900">
+              <a:buFont typeface="Arial" panose="020B0604020202020204" pitchFamily="34" charset="0"/>
+              <a:buChar char="•"/>
+              <a:defRPr sz="2000"/>
+            </a:pPr>
+            <a:r>
+              <a:rPr lang="en-US" dirty="0">
+                <a:latin typeface="Times New Roman" panose="02020603050405020304" pitchFamily="18" charset="0"/>
+                <a:cs typeface="Times New Roman" panose="02020603050405020304" pitchFamily="18" charset="0"/>
+              </a:rPr>
+              <a:t>Transaction is permanently recorded on blockchain.</a:t>
+            </a:r>
+          </a:p>
+          <a:p>
+            <a:pPr>
+              <a:lnSpc>
+                <a:spcPct val="150000"/>
+              </a:lnSpc>
+              <a:spcBef>
+                <a:spcPts val="400"/>
+              </a:spcBef>
+            </a:pPr>
+            <a:endParaRPr lang="en-US" sz="1900" b="0" strike="noStrike" spc="-1" dirty="0">
+              <a:solidFill>
+                <a:srgbClr val="000000"/>
+              </a:solidFill>
+              <a:latin typeface="Calibri"/>
+            </a:endParaRPr>
+          </a:p>
+          <a:p>
+            <a:pPr>
+              <a:lnSpc>
+                <a:spcPct val="150000"/>
+              </a:lnSpc>
+              <a:spcBef>
+                <a:spcPts val="400"/>
+              </a:spcBef>
+            </a:pPr>
+            <a:endParaRPr lang="en-US" sz="1900" b="0" strike="noStrike" spc="-1" dirty="0">
+              <a:solidFill>
+                <a:srgbClr val="000000"/>
+              </a:solidFill>
+              <a:latin typeface="Calibri"/>
+            </a:endParaRPr>
+          </a:p>
+          <a:p>
+            <a:pPr>
+              <a:lnSpc>
+                <a:spcPct val="100000"/>
+              </a:lnSpc>
+              <a:spcBef>
+                <a:spcPts val="400"/>
+              </a:spcBef>
+            </a:pPr>
+            <a:endParaRPr lang="en-US" sz="1900" b="0" strike="noStrike" spc="-1" dirty="0">
+              <a:solidFill>
+                <a:srgbClr val="000000"/>
+              </a:solidFill>
+              <a:latin typeface="Calibri"/>
+            </a:endParaRPr>
+          </a:p>
+          <a:p>
+            <a:pPr>
+              <a:lnSpc>
+                <a:spcPct val="100000"/>
+              </a:lnSpc>
+              <a:spcBef>
+                <a:spcPts val="400"/>
+              </a:spcBef>
+            </a:pPr>
+            <a:endParaRPr lang="en-US" sz="1900" b="0" strike="noStrike" spc="-1" dirty="0">
+              <a:solidFill>
+                <a:srgbClr val="000000"/>
+              </a:solidFill>
+              <a:latin typeface="Calibri"/>
+            </a:endParaRPr>
+          </a:p>
+          <a:p>
+            <a:pPr>
+              <a:lnSpc>
+                <a:spcPct val="100000"/>
+              </a:lnSpc>
+              <a:spcBef>
+                <a:spcPts val="400"/>
+              </a:spcBef>
+            </a:pPr>
+            <a:endParaRPr lang="en-US" sz="1900" b="0" strike="noStrike" spc="-1" dirty="0">
+              <a:solidFill>
+                <a:srgbClr val="000000"/>
+              </a:solidFill>
+              <a:latin typeface="Calibri"/>
+            </a:endParaRPr>
+          </a:p>
+          <a:p>
+            <a:pPr>
+              <a:lnSpc>
+                <a:spcPct val="100000"/>
+              </a:lnSpc>
+              <a:spcBef>
+                <a:spcPts val="400"/>
+              </a:spcBef>
+            </a:pPr>
+            <a:endParaRPr lang="en-US" sz="1900" b="0" strike="noStrike" spc="-1" dirty="0">
+              <a:solidFill>
+                <a:srgbClr val="000000"/>
+              </a:solidFill>
+              <a:latin typeface="Calibri"/>
+            </a:endParaRPr>
+          </a:p>
+          <a:p>
+            <a:pPr>
+              <a:lnSpc>
+                <a:spcPct val="100000"/>
+              </a:lnSpc>
+              <a:spcBef>
+                <a:spcPts val="400"/>
+              </a:spcBef>
+            </a:pPr>
+            <a:endParaRPr lang="en-US" sz="1900" b="0" strike="noStrike" spc="-1" dirty="0">
+              <a:solidFill>
+                <a:srgbClr val="000000"/>
+              </a:solidFill>
+              <a:latin typeface="Calibri"/>
+            </a:endParaRPr>
+          </a:p>
+        </p:txBody>
+      </p:sp>
+      <p:pic>
+        <p:nvPicPr>
+          <p:cNvPr id="3" name="Picture 2">
+            <a:extLst>
+              <a:ext uri="{FF2B5EF4-FFF2-40B4-BE49-F238E27FC236}">
+                <a16:creationId xmlns:a16="http://schemas.microsoft.com/office/drawing/2014/main" id="{C1444F04-4655-81BD-A235-40CABA2D1194}"/>
+              </a:ext>
+            </a:extLst>
+          </p:cNvPr>
+          <p:cNvPicPr>
+            <a:picLocks noChangeAspect="1"/>
+          </p:cNvPicPr>
+          <p:nvPr/>
+        </p:nvPicPr>
+        <p:blipFill>
+          <a:blip r:embed="rId2"/>
+          <a:stretch>
+            <a:fillRect/>
+          </a:stretch>
+        </p:blipFill>
+        <p:spPr>
+          <a:xfrm>
+            <a:off x="2590921" y="3276600"/>
+            <a:ext cx="3464910" cy="3079920"/>
+          </a:xfrm>
+          <a:prstGeom prst="rect">
+            <a:avLst/>
+          </a:prstGeom>
+        </p:spPr>
+      </p:pic>
+    </p:spTree>
+    <p:extLst>
+      <p:ext uri="{BB962C8B-B14F-4D97-AF65-F5344CB8AC3E}">
+        <p14:creationId xmlns:p14="http://schemas.microsoft.com/office/powerpoint/2010/main" val="143734071"/>
+      </p:ext>
+    </p:extLst>
+  </p:cSld>
+  <p:clrMapOvr>
+    <a:masterClrMapping/>
+  </p:clrMapOvr>
+</p:sld>
+</file>
+
+<file path=ppt/slides/slide7.xml><?xml version="1.0" encoding="utf-8"?>
+<p:sld xmlns:a="http://schemas.openxmlformats.org/drawingml/2006/main" xmlns:r="http://schemas.openxmlformats.org/officeDocument/2006/relationships" xmlns:p="http://schemas.openxmlformats.org/presentationml/2006/main">
+  <p:cSld>
+    <p:spTree>
+      <p:nvGrpSpPr>
+        <p:cNvPr id="1" name="">
+          <a:extLst>
+            <a:ext uri="{FF2B5EF4-FFF2-40B4-BE49-F238E27FC236}">
+              <a16:creationId xmlns:a16="http://schemas.microsoft.com/office/drawing/2014/main" id="{DC897CF7-8B76-B893-20BA-8B5957A92177}"/>
+            </a:ext>
+          </a:extLst>
+        </p:cNvPr>
+        <p:cNvGrpSpPr/>
+        <p:nvPr/>
+      </p:nvGrpSpPr>
+      <p:grpSpPr>
+        <a:xfrm>
+          <a:off x="0" y="0"/>
+          <a:ext cx="0" cy="0"/>
+          <a:chOff x="0" y="0"/>
+          <a:chExt cx="0" cy="0"/>
+        </a:xfrm>
+      </p:grpSpPr>
+      <p:sp>
+        <p:nvSpPr>
+          <p:cNvPr id="108" name="TextShape 1">
+            <a:extLst>
+              <a:ext uri="{FF2B5EF4-FFF2-40B4-BE49-F238E27FC236}">
+                <a16:creationId xmlns:a16="http://schemas.microsoft.com/office/drawing/2014/main" id="{5A04A6F1-BECD-7DBB-01EA-76499F196189}"/>
+              </a:ext>
+            </a:extLst>
+          </p:cNvPr>
+          <p:cNvSpPr txBox="1"/>
+          <p:nvPr/>
+        </p:nvSpPr>
+        <p:spPr>
+          <a:xfrm>
+            <a:off x="457200" y="0"/>
+            <a:ext cx="6019560" cy="837720"/>
+          </a:xfrm>
+          <a:prstGeom prst="rect">
+            <a:avLst/>
+          </a:prstGeom>
+          <a:noFill/>
+          <a:ln w="9360">
+            <a:noFill/>
+          </a:ln>
+        </p:spPr>
+        <p:txBody>
+          <a:bodyPr anchor="ctr">
+            <a:noAutofit/>
+          </a:bodyPr>
+          <a:lstStyle/>
+          <a:p>
+            <a:pPr algn="ctr">
+              <a:lnSpc>
+                <a:spcPct val="100000"/>
+              </a:lnSpc>
+            </a:pPr>
+            <a:r>
+              <a:rPr lang="en" sz="3200" dirty="0">
+                <a:latin typeface="Times New Roman" panose="02020603050405020304" pitchFamily="18" charset="0"/>
+                <a:cs typeface="Times New Roman" panose="02020603050405020304" pitchFamily="18" charset="0"/>
+              </a:rPr>
+              <a:t>Fututre Scope</a:t>
+            </a:r>
+            <a:endParaRPr lang="en-US" sz="3000" b="0" strike="noStrike" spc="-1" dirty="0">
+              <a:solidFill>
+                <a:srgbClr val="000000"/>
+              </a:solidFill>
+              <a:latin typeface="Times New Roman" panose="02020603050405020304" pitchFamily="18" charset="0"/>
+              <a:cs typeface="Times New Roman" panose="02020603050405020304" pitchFamily="18" charset="0"/>
+            </a:endParaRPr>
+          </a:p>
+        </p:txBody>
+      </p:sp>
+      <p:sp>
+        <p:nvSpPr>
+          <p:cNvPr id="110" name="TextShape 3">
+            <a:extLst>
+              <a:ext uri="{FF2B5EF4-FFF2-40B4-BE49-F238E27FC236}">
+                <a16:creationId xmlns:a16="http://schemas.microsoft.com/office/drawing/2014/main" id="{330577CF-5172-96AF-49E0-DC7929789FB9}"/>
+              </a:ext>
+            </a:extLst>
+          </p:cNvPr>
+          <p:cNvSpPr txBox="1"/>
+          <p:nvPr/>
+        </p:nvSpPr>
+        <p:spPr>
+          <a:xfrm>
+            <a:off x="6553080" y="6356520"/>
+            <a:ext cx="2133360" cy="364680"/>
+          </a:xfrm>
+          <a:prstGeom prst="rect">
+            <a:avLst/>
+          </a:prstGeom>
+          <a:noFill/>
+          <a:ln>
+            <a:noFill/>
+          </a:ln>
+        </p:spPr>
+        <p:txBody>
+          <a:bodyPr anchor="ctr">
+            <a:noAutofit/>
+          </a:bodyPr>
+          <a:lstStyle/>
+          <a:p>
+            <a:pPr algn="r">
+              <a:lnSpc>
+                <a:spcPct val="100000"/>
+              </a:lnSpc>
+            </a:pPr>
+            <a:fld id="{4D4FEEEE-7AC5-48A9-86F4-13448BE87B58}" type="slidenum">
+              <a:rPr lang="en-US" sz="1200" b="1" strike="noStrike" spc="-1">
+                <a:solidFill>
+                  <a:srgbClr val="000000"/>
+                </a:solidFill>
+                <a:latin typeface="Calibri"/>
+                <a:ea typeface="MS PGothic"/>
+              </a:rPr>
+              <a:pPr algn="r">
+                <a:lnSpc>
+                  <a:spcPct val="100000"/>
+                </a:lnSpc>
+              </a:pPr>
+              <a:t>7</a:t>
+            </a:fld>
+            <a:endParaRPr lang="en-GB" sz="1200" b="0" strike="noStrike" spc="-1">
+              <a:latin typeface="Times New Roman"/>
+            </a:endParaRPr>
+          </a:p>
+        </p:txBody>
+      </p:sp>
+      <p:sp>
+        <p:nvSpPr>
+          <p:cNvPr id="5" name="TextShape 2">
+            <a:extLst>
+              <a:ext uri="{FF2B5EF4-FFF2-40B4-BE49-F238E27FC236}">
                 <a16:creationId xmlns:a16="http://schemas.microsoft.com/office/drawing/2014/main" id="{23636E69-F063-AE3A-1DEA-E32C3B112D00}"/>
               </a:ext>
             </a:extLst>
@@ -5953,7 +6391,7 @@
 </p:sld>
 </file>
 
-<file path=ppt/slides/slide7.xml><?xml version="1.0" encoding="utf-8"?>
+<file path=ppt/slides/slide8.xml><?xml version="1.0" encoding="utf-8"?>
 <p:sld xmlns:a="http://schemas.openxmlformats.org/drawingml/2006/main" xmlns:r="http://schemas.openxmlformats.org/officeDocument/2006/relationships" xmlns:p="http://schemas.openxmlformats.org/presentationml/2006/main">
   <p:cSld>
     <p:spTree>
@@ -6078,7 +6516,7 @@
                   <a:spcPct val="100000"/>
                 </a:lnSpc>
               </a:pPr>
-              <a:t>7</a:t>
+              <a:t>8</a:t>
             </a:fld>
             <a:endParaRPr lang="en-GB" sz="1200" b="0" strike="noStrike" spc="-1">
               <a:latin typeface="Times New Roman"/>
@@ -6383,7 +6821,7 @@
 </p:sld>
 </file>
 
-<file path=ppt/slides/slide8.xml><?xml version="1.0" encoding="utf-8"?>
+<file path=ppt/slides/slide9.xml><?xml version="1.0" encoding="utf-8"?>
 <p:sld xmlns:a="http://schemas.openxmlformats.org/drawingml/2006/main" xmlns:r="http://schemas.openxmlformats.org/officeDocument/2006/relationships" xmlns:p="http://schemas.openxmlformats.org/presentationml/2006/main">
   <p:cSld>
     <p:spTree>
@@ -6508,7 +6946,7 @@
                   <a:spcPct val="100000"/>
                 </a:lnSpc>
               </a:pPr>
-              <a:t>8</a:t>
+              <a:t>9</a:t>
             </a:fld>
             <a:endParaRPr lang="en-GB" sz="1200" b="0" strike="noStrike" spc="-1">
               <a:latin typeface="Times New Roman"/>
@@ -7314,6 +7752,15 @@
 </file>
 
 <file path=customXml/item1.xml><?xml version="1.0" encoding="utf-8"?>
+<?mso-contentType ?>
+<FormTemplates xmlns="http://schemas.microsoft.com/sharepoint/v3/contenttype/forms">
+  <Display>DocumentLibraryForm</Display>
+  <Edit>DocumentLibraryForm</Edit>
+  <New>DocumentLibraryForm</New>
+</FormTemplates>
+</file>
+
+<file path=customXml/item2.xml><?xml version="1.0" encoding="utf-8"?>
 <ct:contentTypeSchema xmlns:ct="http://schemas.microsoft.com/office/2006/metadata/contentType" xmlns:ma="http://schemas.microsoft.com/office/2006/metadata/properties/metaAttributes" ct:_="" ma:_="" ma:contentTypeName="Document" ma:contentTypeID="0x010100096F1BF43DDE004485E7A868D137D60A" ma:contentTypeVersion="0" ma:contentTypeDescription="Create a new document." ma:contentTypeScope="" ma:versionID="47fff7f98a9c49c088ba096c14cf4458">
   <xsd:schema xmlns:xsd="http://www.w3.org/2001/XMLSchema" xmlns:xs="http://www.w3.org/2001/XMLSchema" xmlns:p="http://schemas.microsoft.com/office/2006/metadata/properties" targetNamespace="http://schemas.microsoft.com/office/2006/metadata/properties" ma:root="true" ma:fieldsID="c05e9f2c4932a6a674126b9dde7716ea">
     <xsd:element name="properties">
@@ -7427,15 +7874,6 @@
 </ct:contentTypeSchema>
 </file>
 
-<file path=customXml/item2.xml><?xml version="1.0" encoding="utf-8"?>
-<?mso-contentType ?>
-<FormTemplates xmlns="http://schemas.microsoft.com/sharepoint/v3/contenttype/forms">
-  <Display>DocumentLibraryForm</Display>
-  <Edit>DocumentLibraryForm</Edit>
-  <New>DocumentLibraryForm</New>
-</FormTemplates>
-</file>
-
 <file path=customXml/item3.xml><?xml version="1.0" encoding="utf-8"?>
 <p:properties xmlns:p="http://schemas.microsoft.com/office/2006/metadata/properties" xmlns:xsi="http://www.w3.org/2001/XMLSchema-instance" xmlns:pc="http://schemas.microsoft.com/office/infopath/2007/PartnerControls">
   <documentManagement/>
@@ -7443,6 +7881,14 @@
 </file>
 
 <file path=customXml/itemProps1.xml><?xml version="1.0" encoding="utf-8"?>
+<ds:datastoreItem xmlns:ds="http://schemas.openxmlformats.org/officeDocument/2006/customXml" ds:itemID="{737ED6F0-5E4C-4CD0-9B68-9C53F925A6F7}">
+  <ds:schemaRefs>
+    <ds:schemaRef ds:uri="http://schemas.microsoft.com/sharepoint/v3/contenttype/forms"/>
+  </ds:schemaRefs>
+</ds:datastoreItem>
+</file>
+
+<file path=customXml/itemProps2.xml><?xml version="1.0" encoding="utf-8"?>
 <ds:datastoreItem xmlns:ds="http://schemas.openxmlformats.org/officeDocument/2006/customXml" ds:itemID="{491DF113-39A2-46D5-BFDA-E63300A9ECAB}">
   <ds:schemaRefs>
     <ds:schemaRef ds:uri="http://schemas.microsoft.com/office/2006/metadata/contentType"/>
@@ -7454,14 +7900,6 @@
     <ds:schemaRef ds:uri="http://purl.org/dc/terms/"/>
     <ds:schemaRef ds:uri="http://schemas.microsoft.com/internal/obd"/>
     <ds:schemaRef ds:uri="http://schemas.microsoft.com/office/infopath/2007/PartnerControls"/>
-  </ds:schemaRefs>
-</ds:datastoreItem>
-</file>
-
-<file path=customXml/itemProps2.xml><?xml version="1.0" encoding="utf-8"?>
-<ds:datastoreItem xmlns:ds="http://schemas.openxmlformats.org/officeDocument/2006/customXml" ds:itemID="{737ED6F0-5E4C-4CD0-9B68-9C53F925A6F7}">
-  <ds:schemaRefs>
-    <ds:schemaRef ds:uri="http://schemas.microsoft.com/sharepoint/v3/contenttype/forms"/>
   </ds:schemaRefs>
 </ds:datastoreItem>
 </file>
